--- a/data/deep_dives/carteira_fidc_pague_veloz_fa877ca9/exports/documentary_comparison.pptx
+++ b/data/deep_dives/carteira_fidc_pague_veloz_fa877ca9/exports/documentary_comparison.pptx
@@ -4291,7 +4291,7 @@
                       <a:r>
                         <a:rPr sz="1300" b="1">
                           <a:solidFill>
-                            <a:srgbClr val="1F1F1F"/>
+                            <a:srgbClr val="FFFFFF"/>
                           </a:solidFill>
                           <a:latin typeface="Calibri"/>
                         </a:rPr>
@@ -4301,7 +4301,7 @@
                   </a:txBody>
                   <a:tcPr marL="91440" marR="91440" marT="41148" marB="41148" anchor="ctr">
                     <a:solidFill>
-                      <a:srgbClr val="EC7000"/>
+                      <a:srgbClr val="FF6200"/>
                     </a:solidFill>
                     <a:lnL>
                       <a:noFill/>
@@ -4340,7 +4340,7 @@
                       <a:r>
                         <a:rPr sz="1300" b="1">
                           <a:solidFill>
-                            <a:srgbClr val="1F1F1F"/>
+                            <a:srgbClr val="FFFFFF"/>
                           </a:solidFill>
                           <a:latin typeface="Calibri"/>
                         </a:rPr>
@@ -4350,7 +4350,7 @@
                   </a:txBody>
                   <a:tcPr marL="91440" marR="91440" marT="41148" marB="41148" anchor="ctr">
                     <a:solidFill>
-                      <a:srgbClr val="EC7000"/>
+                      <a:srgbClr val="FF6200"/>
                     </a:solidFill>
                     <a:lnL>
                       <a:noFill/>
@@ -4924,7 +4924,7 @@
                           </a:solidFill>
                           <a:latin typeface="Calibri"/>
                         </a:rPr>
-                        <a:t>Não localizado nas fontes acessíveis desta leitura</a:t>
+                        <a:t>-</a:t>
                       </a:r>
                     </a:p>
                   </a:txBody>
@@ -5128,7 +5128,7 @@
                       <a:r>
                         <a:rPr sz="1300" b="1">
                           <a:solidFill>
-                            <a:srgbClr val="1F1F1F"/>
+                            <a:srgbClr val="FFFFFF"/>
                           </a:solidFill>
                           <a:latin typeface="Calibri"/>
                         </a:rPr>
@@ -5138,7 +5138,7 @@
                   </a:txBody>
                   <a:tcPr marL="91440" marR="91440" marT="41148" marB="41148" anchor="ctr">
                     <a:solidFill>
-                      <a:srgbClr val="EC7000"/>
+                      <a:srgbClr val="FF6200"/>
                     </a:solidFill>
                     <a:lnL>
                       <a:noFill/>
@@ -5177,7 +5177,7 @@
                       <a:r>
                         <a:rPr sz="1300" b="1">
                           <a:solidFill>
-                            <a:srgbClr val="1F1F1F"/>
+                            <a:srgbClr val="FFFFFF"/>
                           </a:solidFill>
                           <a:latin typeface="Calibri"/>
                         </a:rPr>
@@ -5187,7 +5187,7 @@
                   </a:txBody>
                   <a:tcPr marL="91440" marR="91440" marT="41148" marB="41148" anchor="ctr">
                     <a:solidFill>
-                      <a:srgbClr val="EC7000"/>
+                      <a:srgbClr val="FF6200"/>
                     </a:solidFill>
                     <a:lnL>
                       <a:noFill/>
@@ -5515,7 +5515,7 @@
                           </a:solidFill>
                           <a:latin typeface="Calibri"/>
                         </a:rPr>
-                        <a:t>Não localizado nas fontes acessíveis desta leitura</a:t>
+                        <a:t>-</a:t>
                       </a:r>
                     </a:p>
                   </a:txBody>
@@ -5709,7 +5709,7 @@
                           </a:solidFill>
                           <a:latin typeface="Calibri"/>
                         </a:rPr>
-                        <a:t>Fluxos de DC do índice de liquidez são líquidos de PDD; limite percentual próprio não localizado</a:t>
+                        <a:t>Fluxos de DC do índice de liquidez são líquidos de PDD</a:t>
                       </a:r>
                     </a:p>
                   </a:txBody>
@@ -5913,7 +5913,7 @@
                       <a:r>
                         <a:rPr sz="1300" b="1">
                           <a:solidFill>
-                            <a:srgbClr val="1F1F1F"/>
+                            <a:srgbClr val="FFFFFF"/>
                           </a:solidFill>
                           <a:latin typeface="Calibri"/>
                         </a:rPr>
@@ -5923,7 +5923,7 @@
                   </a:txBody>
                   <a:tcPr marL="91440" marR="91440" marT="41148" marB="41148" anchor="ctr">
                     <a:solidFill>
-                      <a:srgbClr val="EC7000"/>
+                      <a:srgbClr val="FF6200"/>
                     </a:solidFill>
                     <a:lnL>
                       <a:noFill/>
@@ -5962,7 +5962,7 @@
                       <a:r>
                         <a:rPr sz="1300" b="1">
                           <a:solidFill>
-                            <a:srgbClr val="1F1F1F"/>
+                            <a:srgbClr val="FFFFFF"/>
                           </a:solidFill>
                           <a:latin typeface="Calibri"/>
                         </a:rPr>
@@ -5972,7 +5972,7 @@
                   </a:txBody>
                   <a:tcPr marL="91440" marR="91440" marT="41148" marB="41148" anchor="ctr">
                     <a:solidFill>
-                      <a:srgbClr val="EC7000"/>
+                      <a:srgbClr val="FF6200"/>
                     </a:solidFill>
                     <a:lnL>
                       <a:noFill/>
@@ -6256,7 +6256,7 @@
                           </a:solidFill>
                           <a:latin typeface="Calibri"/>
                         </a:rPr>
-                        <a:t>Não localizado nas fontes acessíveis desta leitura</a:t>
+                        <a:t>-</a:t>
                       </a:r>
                     </a:p>
                   </a:txBody>
@@ -6352,7 +6352,7 @@
                           </a:solidFill>
                           <a:latin typeface="Calibri"/>
                         </a:rPr>
-                        <a:t>Não localizado nas fontes acessíveis desta leitura</a:t>
+                        <a:t>-</a:t>
                       </a:r>
                     </a:p>
                   </a:txBody>
@@ -6448,7 +6448,7 @@
                           </a:solidFill>
                           <a:latin typeface="Calibri"/>
                         </a:rPr>
-                        <a:t>Não localizado nas fontes acessíveis desta leitura</a:t>
+                        <a:t>-</a:t>
                       </a:r>
                     </a:p>
                   </a:txBody>
@@ -6544,7 +6544,7 @@
                           </a:solidFill>
                           <a:latin typeface="Calibri"/>
                         </a:rPr>
-                        <a:t>Não localizado nas fontes acessíveis desta leitura</a:t>
+                        <a:t>-</a:t>
                       </a:r>
                     </a:p>
                   </a:txBody>
@@ -6964,7 +6964,7 @@
                       <a:r>
                         <a:rPr sz="1300" b="1">
                           <a:solidFill>
-                            <a:srgbClr val="1F1F1F"/>
+                            <a:srgbClr val="FFFFFF"/>
                           </a:solidFill>
                           <a:latin typeface="Calibri"/>
                         </a:rPr>
@@ -6974,7 +6974,7 @@
                   </a:txBody>
                   <a:tcPr marL="91440" marR="91440" marT="41148" marB="41148" anchor="ctr">
                     <a:solidFill>
-                      <a:srgbClr val="EC7000"/>
+                      <a:srgbClr val="FF6200"/>
                     </a:solidFill>
                     <a:lnL>
                       <a:noFill/>
@@ -7013,7 +7013,7 @@
                       <a:r>
                         <a:rPr sz="1300" b="1">
                           <a:solidFill>
-                            <a:srgbClr val="1F1F1F"/>
+                            <a:srgbClr val="FFFFFF"/>
                           </a:solidFill>
                           <a:latin typeface="Calibri"/>
                         </a:rPr>
@@ -7023,7 +7023,7 @@
                   </a:txBody>
                   <a:tcPr marL="91440" marR="91440" marT="41148" marB="41148" anchor="ctr">
                     <a:solidFill>
-                      <a:srgbClr val="EC7000"/>
+                      <a:srgbClr val="FF6200"/>
                     </a:solidFill>
                     <a:lnL>
                       <a:noFill/>
@@ -7307,7 +7307,7 @@
                           </a:solidFill>
                           <a:latin typeface="Calibri"/>
                         </a:rPr>
-                        <a:t>Não localizado nas fontes acessíveis desta leitura</a:t>
+                        <a:t>-</a:t>
                       </a:r>
                     </a:p>
                   </a:txBody>
@@ -7405,7 +7405,7 @@
                           </a:solidFill>
                           <a:latin typeface="Calibri"/>
                         </a:rPr>
-                        <a:t>Não localizado nas fontes acessíveis desta leitura</a:t>
+                        <a:t>-</a:t>
                       </a:r>
                     </a:p>
                   </a:txBody>
@@ -7609,7 +7609,7 @@
                       <a:r>
                         <a:rPr sz="1300" b="1">
                           <a:solidFill>
-                            <a:srgbClr val="1F1F1F"/>
+                            <a:srgbClr val="FFFFFF"/>
                           </a:solidFill>
                           <a:latin typeface="Calibri"/>
                         </a:rPr>
@@ -7619,7 +7619,7 @@
                   </a:txBody>
                   <a:tcPr marL="91440" marR="91440" marT="41148" marB="41148" anchor="ctr">
                     <a:solidFill>
-                      <a:srgbClr val="EC7000"/>
+                      <a:srgbClr val="FF6200"/>
                     </a:solidFill>
                     <a:lnL>
                       <a:noFill/>
@@ -7658,7 +7658,7 @@
                       <a:r>
                         <a:rPr sz="1300" b="1">
                           <a:solidFill>
-                            <a:srgbClr val="1F1F1F"/>
+                            <a:srgbClr val="FFFFFF"/>
                           </a:solidFill>
                           <a:latin typeface="Calibri"/>
                         </a:rPr>
@@ -7668,7 +7668,7 @@
                   </a:txBody>
                   <a:tcPr marL="91440" marR="91440" marT="41148" marB="41148" anchor="ctr">
                     <a:solidFill>
-                      <a:srgbClr val="EC7000"/>
+                      <a:srgbClr val="FF6200"/>
                     </a:solidFill>
                     <a:lnL>
                       <a:noFill/>
@@ -8158,7 +8158,7 @@
                       <a:r>
                         <a:rPr sz="1300" b="1">
                           <a:solidFill>
-                            <a:srgbClr val="1F1F1F"/>
+                            <a:srgbClr val="FFFFFF"/>
                           </a:solidFill>
                           <a:latin typeface="Calibri"/>
                         </a:rPr>
@@ -8168,7 +8168,7 @@
                   </a:txBody>
                   <a:tcPr marL="91440" marR="91440" marT="41148" marB="41148" anchor="ctr">
                     <a:solidFill>
-                      <a:srgbClr val="EC7000"/>
+                      <a:srgbClr val="FF6200"/>
                     </a:solidFill>
                     <a:lnL>
                       <a:noFill/>
@@ -8207,7 +8207,7 @@
                       <a:r>
                         <a:rPr sz="1300" b="1">
                           <a:solidFill>
-                            <a:srgbClr val="1F1F1F"/>
+                            <a:srgbClr val="FFFFFF"/>
                           </a:solidFill>
                           <a:latin typeface="Calibri"/>
                         </a:rPr>
@@ -8217,7 +8217,7 @@
                   </a:txBody>
                   <a:tcPr marL="91440" marR="91440" marT="41148" marB="41148" anchor="ctr">
                     <a:solidFill>
-                      <a:srgbClr val="EC7000"/>
+                      <a:srgbClr val="FF6200"/>
                     </a:solidFill>
                     <a:lnL>
                       <a:noFill/>
@@ -8707,7 +8707,7 @@
                       <a:r>
                         <a:rPr sz="1300" b="1">
                           <a:solidFill>
-                            <a:srgbClr val="1F1F1F"/>
+                            <a:srgbClr val="FFFFFF"/>
                           </a:solidFill>
                           <a:latin typeface="Calibri"/>
                         </a:rPr>
@@ -8717,7 +8717,7 @@
                   </a:txBody>
                   <a:tcPr marL="91440" marR="91440" marT="41148" marB="41148" anchor="ctr">
                     <a:solidFill>
-                      <a:srgbClr val="EC7000"/>
+                      <a:srgbClr val="FF6200"/>
                     </a:solidFill>
                     <a:lnL>
                       <a:noFill/>
@@ -8756,7 +8756,7 @@
                       <a:r>
                         <a:rPr sz="1300" b="1">
                           <a:solidFill>
-                            <a:srgbClr val="1F1F1F"/>
+                            <a:srgbClr val="FFFFFF"/>
                           </a:solidFill>
                           <a:latin typeface="Calibri"/>
                         </a:rPr>
@@ -8766,7 +8766,7 @@
                   </a:txBody>
                   <a:tcPr marL="91440" marR="91440" marT="41148" marB="41148" anchor="ctr">
                     <a:solidFill>
-                      <a:srgbClr val="EC7000"/>
+                      <a:srgbClr val="FF6200"/>
                     </a:solidFill>
                     <a:lnL>
                       <a:noFill/>
@@ -8880,7 +8880,7 @@
                           </a:solidFill>
                           <a:latin typeface="Calibri"/>
                         </a:rPr>
-                        <a:t>DC/PL e cotas/PL são candidatos; validar denominadores, subclasses e exclusões</a:t>
+                        <a:t>DC/PL e cotas/PL são candidatos</a:t>
                       </a:r>
                     </a:p>
                   </a:txBody>
